--- a/Documents/Presentation/Project Update/Project Update 5 (week9 & 10.pptx
+++ b/Documents/Presentation/Project Update/Project Update 5 (week9 & 10.pptx
@@ -3601,7 +3601,7 @@
             <p:ph idx="1"/>
             <p:extLst>
               <p:ext uri="{D42A27DB-BD31-4B8C-83A1-F6EECF244321}">
-                <p14:modId xmlns:p14="http://schemas.microsoft.com/office/powerpoint/2010/main" val="1681507255"/>
+                <p14:modId xmlns:p14="http://schemas.microsoft.com/office/powerpoint/2010/main" val="1430741902"/>
               </p:ext>
             </p:extLst>
           </p:nvPr>
@@ -3917,6 +3917,9 @@
                       </a:pPr>
                       <a:r>
                         <a:rPr lang="en-US" sz="1400" u="none" strike="noStrike" dirty="0">
+                          <a:solidFill>
+                            <a:srgbClr val="0070C0"/>
+                          </a:solidFill>
                           <a:effectLst/>
                           <a:latin typeface="Candara" panose="020E0502030303020204" pitchFamily="34" charset="0"/>
                         </a:rPr>
@@ -3924,7 +3927,7 @@
                       </a:r>
                       <a:endParaRPr lang="en-US" sz="1400" b="1" i="0" u="none" strike="noStrike" dirty="0">
                         <a:solidFill>
-                          <a:srgbClr val="000000"/>
+                          <a:srgbClr val="0070C0"/>
                         </a:solidFill>
                         <a:effectLst/>
                         <a:latin typeface="Candara" panose="020E0502030303020204" pitchFamily="34" charset="0"/>
@@ -3943,6 +3946,9 @@
                       </a:pPr>
                       <a:r>
                         <a:rPr lang="en-US" sz="1400" u="none" strike="noStrike" dirty="0">
+                          <a:solidFill>
+                            <a:srgbClr val="0070C0"/>
+                          </a:solidFill>
                           <a:effectLst/>
                           <a:latin typeface="Candara" panose="020E0502030303020204" pitchFamily="34" charset="0"/>
                         </a:rPr>
@@ -3950,7 +3956,7 @@
                       </a:r>
                       <a:endParaRPr lang="en-US" sz="1400" b="0" i="0" u="none" strike="noStrike" dirty="0">
                         <a:solidFill>
-                          <a:srgbClr val="000000"/>
+                          <a:srgbClr val="0070C0"/>
                         </a:solidFill>
                         <a:effectLst/>
                         <a:latin typeface="Candara" panose="020E0502030303020204" pitchFamily="34" charset="0"/>
@@ -3969,6 +3975,9 @@
                       </a:pPr>
                       <a:r>
                         <a:rPr lang="en-US" sz="1400" u="none" strike="noStrike">
+                          <a:solidFill>
+                            <a:srgbClr val="0070C0"/>
+                          </a:solidFill>
                           <a:effectLst/>
                           <a:latin typeface="Candara" panose="020E0502030303020204" pitchFamily="34" charset="0"/>
                         </a:rPr>
@@ -3976,7 +3985,7 @@
                       </a:r>
                       <a:endParaRPr lang="en-US" sz="1400" b="0" i="0" u="none" strike="noStrike">
                         <a:solidFill>
-                          <a:srgbClr val="000000"/>
+                          <a:srgbClr val="0070C0"/>
                         </a:solidFill>
                         <a:effectLst/>
                         <a:latin typeface="Candara" panose="020E0502030303020204" pitchFamily="34" charset="0"/>
@@ -3995,6 +4004,9 @@
                       </a:pPr>
                       <a:r>
                         <a:rPr lang="en-US" sz="1400" u="none" strike="noStrike" dirty="0">
+                          <a:solidFill>
+                            <a:srgbClr val="0070C0"/>
+                          </a:solidFill>
                           <a:effectLst/>
                           <a:latin typeface="Candara" panose="020E0502030303020204" pitchFamily="34" charset="0"/>
                         </a:rPr>
@@ -4002,7 +4014,7 @@
                       </a:r>
                       <a:endParaRPr lang="en-US" sz="1400" b="1" i="0" u="none" strike="noStrike" dirty="0">
                         <a:solidFill>
-                          <a:srgbClr val="000000"/>
+                          <a:srgbClr val="0070C0"/>
                         </a:solidFill>
                         <a:effectLst/>
                         <a:latin typeface="Candara" panose="020E0502030303020204" pitchFamily="34" charset="0"/>
@@ -4021,6 +4033,9 @@
                       </a:pPr>
                       <a:r>
                         <a:rPr lang="en-US" sz="1400" u="none" strike="noStrike">
+                          <a:solidFill>
+                            <a:srgbClr val="0070C0"/>
+                          </a:solidFill>
                           <a:effectLst/>
                           <a:latin typeface="Candara" panose="020E0502030303020204" pitchFamily="34" charset="0"/>
                         </a:rPr>
@@ -4028,7 +4043,7 @@
                       </a:r>
                       <a:endParaRPr lang="en-US" sz="1400" b="1" i="0" u="none" strike="noStrike">
                         <a:solidFill>
-                          <a:srgbClr val="000000"/>
+                          <a:srgbClr val="0070C0"/>
                         </a:solidFill>
                         <a:effectLst/>
                         <a:latin typeface="Candara" panose="020E0502030303020204" pitchFamily="34" charset="0"/>
@@ -4047,6 +4062,9 @@
                       </a:pPr>
                       <a:r>
                         <a:rPr lang="en-US" sz="1400" u="none" strike="noStrike">
+                          <a:solidFill>
+                            <a:srgbClr val="0070C0"/>
+                          </a:solidFill>
                           <a:effectLst/>
                           <a:latin typeface="Candara" panose="020E0502030303020204" pitchFamily="34" charset="0"/>
                         </a:rPr>
@@ -4054,7 +4072,7 @@
                       </a:r>
                       <a:endParaRPr lang="en-US" sz="1400" b="0" i="0" u="none" strike="noStrike">
                         <a:solidFill>
-                          <a:srgbClr val="000000"/>
+                          <a:srgbClr val="0070C0"/>
                         </a:solidFill>
                         <a:effectLst/>
                         <a:latin typeface="Candara" panose="020E0502030303020204" pitchFamily="34" charset="0"/>
@@ -4079,15 +4097,18 @@
                         <a:buNone/>
                       </a:pPr>
                       <a:r>
-                        <a:rPr lang="en-US" sz="1400" u="none" strike="noStrike">
+                        <a:rPr lang="en-US" sz="1400" u="none" strike="noStrike" dirty="0">
+                          <a:solidFill>
+                            <a:srgbClr val="0070C0"/>
+                          </a:solidFill>
                           <a:effectLst/>
                           <a:latin typeface="Candara" panose="020E0502030303020204" pitchFamily="34" charset="0"/>
                         </a:rPr>
                         <a:t>Week 3–4</a:t>
                       </a:r>
-                      <a:endParaRPr lang="en-US" sz="1400" b="1" i="0" u="none" strike="noStrike">
+                      <a:endParaRPr lang="en-US" sz="1400" b="1" i="0" u="none" strike="noStrike" dirty="0">
                         <a:solidFill>
-                          <a:srgbClr val="000000"/>
+                          <a:srgbClr val="0070C0"/>
                         </a:solidFill>
                         <a:effectLst/>
                         <a:latin typeface="Candara" panose="020E0502030303020204" pitchFamily="34" charset="0"/>
@@ -4106,6 +4127,9 @@
                       </a:pPr>
                       <a:r>
                         <a:rPr lang="en-US" sz="1400" u="none" strike="noStrike" dirty="0">
+                          <a:solidFill>
+                            <a:srgbClr val="0070C0"/>
+                          </a:solidFill>
                           <a:effectLst/>
                           <a:latin typeface="Candara" panose="020E0502030303020204" pitchFamily="34" charset="0"/>
                         </a:rPr>
@@ -4113,7 +4137,7 @@
                       </a:r>
                       <a:endParaRPr lang="en-US" sz="1400" b="0" i="0" u="none" strike="noStrike" dirty="0">
                         <a:solidFill>
-                          <a:srgbClr val="000000"/>
+                          <a:srgbClr val="0070C0"/>
                         </a:solidFill>
                         <a:effectLst/>
                         <a:latin typeface="Candara" panose="020E0502030303020204" pitchFamily="34" charset="0"/>
@@ -4132,6 +4156,9 @@
                       </a:pPr>
                       <a:r>
                         <a:rPr lang="en-US" sz="1400" u="none" strike="noStrike">
+                          <a:solidFill>
+                            <a:srgbClr val="0070C0"/>
+                          </a:solidFill>
                           <a:effectLst/>
                           <a:latin typeface="Candara" panose="020E0502030303020204" pitchFamily="34" charset="0"/>
                         </a:rPr>
@@ -4139,7 +4166,7 @@
                       </a:r>
                       <a:endParaRPr lang="en-US" sz="1400" b="0" i="0" u="none" strike="noStrike">
                         <a:solidFill>
-                          <a:srgbClr val="000000"/>
+                          <a:srgbClr val="0070C0"/>
                         </a:solidFill>
                         <a:effectLst/>
                         <a:latin typeface="Candara" panose="020E0502030303020204" pitchFamily="34" charset="0"/>
@@ -4158,6 +4185,9 @@
                       </a:pPr>
                       <a:r>
                         <a:rPr lang="en-US" sz="1400" u="none" strike="noStrike" dirty="0">
+                          <a:solidFill>
+                            <a:srgbClr val="0070C0"/>
+                          </a:solidFill>
                           <a:effectLst/>
                           <a:latin typeface="Candara" panose="020E0502030303020204" pitchFamily="34" charset="0"/>
                         </a:rPr>
@@ -4165,7 +4195,7 @@
                       </a:r>
                       <a:endParaRPr lang="en-US" sz="1400" b="1" i="0" u="none" strike="noStrike" dirty="0">
                         <a:solidFill>
-                          <a:srgbClr val="000000"/>
+                          <a:srgbClr val="0070C0"/>
                         </a:solidFill>
                         <a:effectLst/>
                         <a:latin typeface="Candara" panose="020E0502030303020204" pitchFamily="34" charset="0"/>
@@ -4184,6 +4214,9 @@
                       </a:pPr>
                       <a:r>
                         <a:rPr lang="en-US" sz="1400" u="none" strike="noStrike">
+                          <a:solidFill>
+                            <a:srgbClr val="0070C0"/>
+                          </a:solidFill>
                           <a:effectLst/>
                           <a:latin typeface="Candara" panose="020E0502030303020204" pitchFamily="34" charset="0"/>
                         </a:rPr>
@@ -4191,7 +4224,7 @@
                       </a:r>
                       <a:endParaRPr lang="en-US" sz="1400" b="1" i="0" u="none" strike="noStrike">
                         <a:solidFill>
-                          <a:srgbClr val="000000"/>
+                          <a:srgbClr val="0070C0"/>
                         </a:solidFill>
                         <a:effectLst/>
                         <a:latin typeface="Candara" panose="020E0502030303020204" pitchFamily="34" charset="0"/>
@@ -4210,6 +4243,9 @@
                       </a:pPr>
                       <a:r>
                         <a:rPr lang="en-US" sz="1400" u="none" strike="noStrike">
+                          <a:solidFill>
+                            <a:srgbClr val="0070C0"/>
+                          </a:solidFill>
                           <a:effectLst/>
                           <a:latin typeface="Candara" panose="020E0502030303020204" pitchFamily="34" charset="0"/>
                         </a:rPr>
@@ -4217,7 +4253,7 @@
                       </a:r>
                       <a:endParaRPr lang="en-US" sz="1400" b="0" i="0" u="none" strike="noStrike">
                         <a:solidFill>
-                          <a:srgbClr val="000000"/>
+                          <a:srgbClr val="0070C0"/>
                         </a:solidFill>
                         <a:effectLst/>
                         <a:latin typeface="Candara" panose="020E0502030303020204" pitchFamily="34" charset="0"/>
@@ -4243,6 +4279,9 @@
                       </a:pPr>
                       <a:r>
                         <a:rPr lang="en-US" sz="1400" u="none" strike="noStrike">
+                          <a:solidFill>
+                            <a:srgbClr val="0070C0"/>
+                          </a:solidFill>
                           <a:effectLst/>
                           <a:latin typeface="Candara" panose="020E0502030303020204" pitchFamily="34" charset="0"/>
                         </a:rPr>
@@ -4250,7 +4289,7 @@
                       </a:r>
                       <a:endParaRPr lang="en-US" sz="1400" b="1" i="0" u="none" strike="noStrike">
                         <a:solidFill>
-                          <a:srgbClr val="000000"/>
+                          <a:srgbClr val="0070C0"/>
                         </a:solidFill>
                         <a:effectLst/>
                         <a:latin typeface="Candara" panose="020E0502030303020204" pitchFamily="34" charset="0"/>
@@ -4268,15 +4307,18 @@
                         <a:buNone/>
                       </a:pPr>
                       <a:r>
-                        <a:rPr lang="en-US" sz="1400" u="none" strike="noStrike">
+                        <a:rPr lang="en-US" sz="1400" u="none" strike="noStrike" dirty="0">
+                          <a:solidFill>
+                            <a:srgbClr val="0070C0"/>
+                          </a:solidFill>
                           <a:effectLst/>
                           <a:latin typeface="Candara" panose="020E0502030303020204" pitchFamily="34" charset="0"/>
                         </a:rPr>
                         <a:t>5/4 – 5/17</a:t>
                       </a:r>
-                      <a:endParaRPr lang="en-US" sz="1400" b="0" i="0" u="none" strike="noStrike">
+                      <a:endParaRPr lang="en-US" sz="1400" b="0" i="0" u="none" strike="noStrike" dirty="0">
                         <a:solidFill>
-                          <a:srgbClr val="000000"/>
+                          <a:srgbClr val="0070C0"/>
                         </a:solidFill>
                         <a:effectLst/>
                         <a:latin typeface="Candara" panose="020E0502030303020204" pitchFamily="34" charset="0"/>
@@ -4295,6 +4337,9 @@
                       </a:pPr>
                       <a:r>
                         <a:rPr lang="en-US" sz="1400" u="none" strike="noStrike">
+                          <a:solidFill>
+                            <a:srgbClr val="0070C0"/>
+                          </a:solidFill>
                           <a:effectLst/>
                           <a:latin typeface="Candara" panose="020E0502030303020204" pitchFamily="34" charset="0"/>
                         </a:rPr>
@@ -4302,7 +4347,7 @@
                       </a:r>
                       <a:endParaRPr lang="en-US" sz="1400" b="0" i="0" u="none" strike="noStrike">
                         <a:solidFill>
-                          <a:srgbClr val="000000"/>
+                          <a:srgbClr val="0070C0"/>
                         </a:solidFill>
                         <a:effectLst/>
                         <a:latin typeface="Candara" panose="020E0502030303020204" pitchFamily="34" charset="0"/>
@@ -4321,6 +4366,9 @@
                       </a:pPr>
                       <a:r>
                         <a:rPr lang="en-US" sz="1400" u="none" strike="noStrike" dirty="0">
+                          <a:solidFill>
+                            <a:srgbClr val="0070C0"/>
+                          </a:solidFill>
                           <a:effectLst/>
                           <a:latin typeface="Candara" panose="020E0502030303020204" pitchFamily="34" charset="0"/>
                         </a:rPr>
@@ -4328,6 +4376,9 @@
                       </a:r>
                       <a:r>
                         <a:rPr lang="en-US" sz="1400" u="none" strike="noStrike" dirty="0" err="1">
+                          <a:solidFill>
+                            <a:srgbClr val="0070C0"/>
+                          </a:solidFill>
                           <a:effectLst/>
                           <a:latin typeface="Candara" panose="020E0502030303020204" pitchFamily="34" charset="0"/>
                         </a:rPr>
@@ -4335,6 +4386,9 @@
                       </a:r>
                       <a:r>
                         <a:rPr lang="en-US" sz="1400" u="none" strike="noStrike" dirty="0">
+                          <a:solidFill>
+                            <a:srgbClr val="0070C0"/>
+                          </a:solidFill>
                           <a:effectLst/>
                           <a:latin typeface="Candara" panose="020E0502030303020204" pitchFamily="34" charset="0"/>
                         </a:rPr>
@@ -4342,7 +4396,7 @@
                       </a:r>
                       <a:endParaRPr lang="en-US" sz="1400" b="0" i="0" u="none" strike="noStrike" dirty="0">
                         <a:solidFill>
-                          <a:srgbClr val="000000"/>
+                          <a:srgbClr val="0070C0"/>
                         </a:solidFill>
                         <a:effectLst/>
                         <a:latin typeface="Candara" panose="020E0502030303020204" pitchFamily="34" charset="0"/>
@@ -4361,6 +4415,9 @@
                       </a:pPr>
                       <a:r>
                         <a:rPr lang="en-US" sz="1400" u="none" strike="noStrike">
+                          <a:solidFill>
+                            <a:srgbClr val="0070C0"/>
+                          </a:solidFill>
                           <a:effectLst/>
                           <a:latin typeface="Candara" panose="020E0502030303020204" pitchFamily="34" charset="0"/>
                         </a:rPr>
@@ -4368,7 +4425,7 @@
                       </a:r>
                       <a:endParaRPr lang="en-US" sz="1400" b="0" i="0" u="none" strike="noStrike">
                         <a:solidFill>
-                          <a:srgbClr val="000000"/>
+                          <a:srgbClr val="0070C0"/>
                         </a:solidFill>
                         <a:effectLst/>
                         <a:latin typeface="Candara" panose="020E0502030303020204" pitchFamily="34" charset="0"/>
@@ -4387,6 +4444,9 @@
                       </a:pPr>
                       <a:r>
                         <a:rPr lang="en-US" sz="1400" u="none" strike="noStrike" dirty="0">
+                          <a:solidFill>
+                            <a:srgbClr val="0070C0"/>
+                          </a:solidFill>
                           <a:effectLst/>
                           <a:latin typeface="Candara" panose="020E0502030303020204" pitchFamily="34" charset="0"/>
                         </a:rPr>
@@ -4394,6 +4454,9 @@
                       </a:r>
                       <a:r>
                         <a:rPr lang="en-US" sz="1400" u="none" strike="noStrike" dirty="0" err="1">
+                          <a:solidFill>
+                            <a:srgbClr val="0070C0"/>
+                          </a:solidFill>
                           <a:effectLst/>
                           <a:latin typeface="Candara" panose="020E0502030303020204" pitchFamily="34" charset="0"/>
                         </a:rPr>
@@ -4401,6 +4464,9 @@
                       </a:r>
                       <a:r>
                         <a:rPr lang="en-US" sz="1400" u="none" strike="noStrike" dirty="0">
+                          <a:solidFill>
+                            <a:srgbClr val="0070C0"/>
+                          </a:solidFill>
                           <a:effectLst/>
                           <a:latin typeface="Candara" panose="020E0502030303020204" pitchFamily="34" charset="0"/>
                         </a:rPr>
@@ -4408,7 +4474,7 @@
                       </a:r>
                       <a:endParaRPr lang="en-US" sz="1400" b="0" i="0" u="none" strike="noStrike" dirty="0">
                         <a:solidFill>
-                          <a:srgbClr val="000000"/>
+                          <a:srgbClr val="0070C0"/>
                         </a:solidFill>
                         <a:effectLst/>
                         <a:latin typeface="Candara" panose="020E0502030303020204" pitchFamily="34" charset="0"/>
@@ -4434,6 +4500,9 @@
                       </a:pPr>
                       <a:r>
                         <a:rPr lang="en-US" sz="1400" u="none" strike="noStrike">
+                          <a:solidFill>
+                            <a:srgbClr val="0070C0"/>
+                          </a:solidFill>
                           <a:effectLst/>
                           <a:latin typeface="Candara" panose="020E0502030303020204" pitchFamily="34" charset="0"/>
                         </a:rPr>
@@ -4441,7 +4510,7 @@
                       </a:r>
                       <a:endParaRPr lang="en-US" sz="1400" b="1" i="0" u="none" strike="noStrike">
                         <a:solidFill>
-                          <a:srgbClr val="000000"/>
+                          <a:srgbClr val="0070C0"/>
                         </a:solidFill>
                         <a:effectLst/>
                         <a:latin typeface="Candara" panose="020E0502030303020204" pitchFamily="34" charset="0"/>
@@ -4460,6 +4529,9 @@
                       </a:pPr>
                       <a:r>
                         <a:rPr lang="en-US" sz="1400" u="none" strike="noStrike">
+                          <a:solidFill>
+                            <a:srgbClr val="0070C0"/>
+                          </a:solidFill>
                           <a:effectLst/>
                           <a:latin typeface="Candara" panose="020E0502030303020204" pitchFamily="34" charset="0"/>
                         </a:rPr>
@@ -4467,7 +4539,7 @@
                       </a:r>
                       <a:endParaRPr lang="en-US" sz="1400" b="0" i="0" u="none" strike="noStrike">
                         <a:solidFill>
-                          <a:srgbClr val="000000"/>
+                          <a:srgbClr val="0070C0"/>
                         </a:solidFill>
                         <a:effectLst/>
                         <a:latin typeface="Candara" panose="020E0502030303020204" pitchFamily="34" charset="0"/>
@@ -4486,6 +4558,9 @@
                       </a:pPr>
                       <a:r>
                         <a:rPr lang="en-US" sz="1400" u="none" strike="noStrike">
+                          <a:solidFill>
+                            <a:srgbClr val="0070C0"/>
+                          </a:solidFill>
                           <a:effectLst/>
                           <a:latin typeface="Candara" panose="020E0502030303020204" pitchFamily="34" charset="0"/>
                         </a:rPr>
@@ -4493,7 +4568,7 @@
                       </a:r>
                       <a:endParaRPr lang="en-US" sz="1400" b="0" i="0" u="none" strike="noStrike">
                         <a:solidFill>
-                          <a:srgbClr val="000000"/>
+                          <a:srgbClr val="0070C0"/>
                         </a:solidFill>
                         <a:effectLst/>
                         <a:latin typeface="Candara" panose="020E0502030303020204" pitchFamily="34" charset="0"/>
@@ -4512,6 +4587,9 @@
                       </a:pPr>
                       <a:r>
                         <a:rPr lang="en-US" sz="1400" u="none" strike="noStrike" dirty="0">
+                          <a:solidFill>
+                            <a:srgbClr val="0070C0"/>
+                          </a:solidFill>
                           <a:effectLst/>
                           <a:latin typeface="Candara" panose="020E0502030303020204" pitchFamily="34" charset="0"/>
                         </a:rPr>
@@ -4519,7 +4597,7 @@
                       </a:r>
                       <a:endParaRPr lang="en-US" sz="1400" b="1" i="0" u="none" strike="noStrike" dirty="0">
                         <a:solidFill>
-                          <a:srgbClr val="000000"/>
+                          <a:srgbClr val="0070C0"/>
                         </a:solidFill>
                         <a:effectLst/>
                         <a:latin typeface="Candara" panose="020E0502030303020204" pitchFamily="34" charset="0"/>
@@ -4538,6 +4616,9 @@
                       </a:pPr>
                       <a:r>
                         <a:rPr lang="en-US" sz="1400" u="none" strike="noStrike" dirty="0">
+                          <a:solidFill>
+                            <a:srgbClr val="0070C0"/>
+                          </a:solidFill>
                           <a:effectLst/>
                           <a:latin typeface="Candara" panose="020E0502030303020204" pitchFamily="34" charset="0"/>
                         </a:rPr>
@@ -4545,7 +4626,7 @@
                       </a:r>
                       <a:endParaRPr lang="en-US" sz="1400" b="1" i="0" u="none" strike="noStrike" dirty="0">
                         <a:solidFill>
-                          <a:srgbClr val="000000"/>
+                          <a:srgbClr val="0070C0"/>
                         </a:solidFill>
                         <a:effectLst/>
                         <a:latin typeface="Candara" panose="020E0502030303020204" pitchFamily="34" charset="0"/>
@@ -4564,6 +4645,9 @@
                       </a:pPr>
                       <a:r>
                         <a:rPr lang="en-US" sz="1400" u="none" strike="noStrike" dirty="0">
+                          <a:solidFill>
+                            <a:srgbClr val="0070C0"/>
+                          </a:solidFill>
                           <a:effectLst/>
                           <a:latin typeface="Candara" panose="020E0502030303020204" pitchFamily="34" charset="0"/>
                         </a:rPr>
@@ -4571,6 +4655,9 @@
                       </a:r>
                       <a:r>
                         <a:rPr lang="en-US" sz="1400" u="none" strike="noStrike" dirty="0" err="1">
+                          <a:solidFill>
+                            <a:srgbClr val="0070C0"/>
+                          </a:solidFill>
                           <a:effectLst/>
                           <a:latin typeface="Candara" panose="020E0502030303020204" pitchFamily="34" charset="0"/>
                         </a:rPr>
@@ -4578,6 +4665,9 @@
                       </a:r>
                       <a:r>
                         <a:rPr lang="en-US" sz="1400" u="none" strike="noStrike" dirty="0">
+                          <a:solidFill>
+                            <a:srgbClr val="0070C0"/>
+                          </a:solidFill>
                           <a:effectLst/>
                           <a:latin typeface="Candara" panose="020E0502030303020204" pitchFamily="34" charset="0"/>
                         </a:rPr>
@@ -4585,7 +4675,7 @@
                       </a:r>
                       <a:endParaRPr lang="en-US" sz="1400" b="0" i="0" u="none" strike="noStrike" dirty="0">
                         <a:solidFill>
-                          <a:srgbClr val="000000"/>
+                          <a:srgbClr val="0070C0"/>
                         </a:solidFill>
                         <a:effectLst/>
                         <a:latin typeface="Candara" panose="020E0502030303020204" pitchFamily="34" charset="0"/>
